--- a/Prueba tecnica.pptx
+++ b/Prueba tecnica.pptx
@@ -6,13 +6,15 @@
   </p:sldMasterIdLst>
   <p:sldIdLst>
     <p:sldId id="256" r:id="rId2"/>
-    <p:sldId id="257" r:id="rId3"/>
-    <p:sldId id="258" r:id="rId4"/>
-    <p:sldId id="259" r:id="rId5"/>
-    <p:sldId id="260" r:id="rId6"/>
-    <p:sldId id="261" r:id="rId7"/>
-    <p:sldId id="262" r:id="rId8"/>
-    <p:sldId id="263" r:id="rId9"/>
+    <p:sldId id="265" r:id="rId3"/>
+    <p:sldId id="257" r:id="rId4"/>
+    <p:sldId id="258" r:id="rId5"/>
+    <p:sldId id="259" r:id="rId6"/>
+    <p:sldId id="260" r:id="rId7"/>
+    <p:sldId id="261" r:id="rId8"/>
+    <p:sldId id="262" r:id="rId9"/>
+    <p:sldId id="264" r:id="rId10"/>
+    <p:sldId id="263" r:id="rId11"/>
   </p:sldIdLst>
   <p:sldSz cx="12192000" cy="6858000"/>
   <p:notesSz cx="6858000" cy="9144000"/>
@@ -111,13 +113,18 @@
       </a:defRPr>
     </a:lvl9pPr>
   </p:defaultTextStyle>
+  <p:extLst>
+    <p:ext uri="{EFAFB233-063F-42B5-8137-9DF3F51BA10A}">
+      <p15:sldGuideLst xmlns:p15="http://schemas.microsoft.com/office/powerpoint/2012/main"/>
+    </p:ext>
+  </p:extLst>
 </p:presentation>
 </file>
 
 <file path=ppt/revisionInfo.xml><?xml version="1.0" encoding="utf-8"?>
 <p1510:revInfo xmlns:a="http://schemas.openxmlformats.org/drawingml/2006/main" xmlns:r="http://schemas.openxmlformats.org/officeDocument/2006/relationships" xmlns:p1510="http://schemas.microsoft.com/office/powerpoint/2015/10/main">
   <p1510:revLst>
-    <p1510:client id="{35411CB6-3473-42D1-801D-EB04563067EF}" v="452" dt="2026-01-06T00:06:17.191"/>
+    <p1510:client id="{35411CB6-3473-42D1-801D-EB04563067EF}" v="464" dt="2026-01-06T15:07:23.498"/>
   </p1510:revLst>
 </p1510:revInfo>
 </file>
@@ -126,8 +133,8 @@
 <pc:chgInfo xmlns:a="http://schemas.openxmlformats.org/drawingml/2006/main" xmlns:r="http://schemas.openxmlformats.org/officeDocument/2006/relationships" xmlns:ac="http://schemas.microsoft.com/office/drawing/2013/main/command" xmlns:pc="http://schemas.microsoft.com/office/powerpoint/2013/main/command">
   <pc:docChgLst>
     <pc:chgData name="Cristian Rubio" userId="8dd58e6179b8f369" providerId="LiveId" clId="{C275EF3F-3B15-4401-B7B1-2B7E8C84C799}"/>
-    <pc:docChg chg="undo custSel addSld delSld modSld">
-      <pc:chgData name="Cristian Rubio" userId="8dd58e6179b8f369" providerId="LiveId" clId="{C275EF3F-3B15-4401-B7B1-2B7E8C84C799}" dt="2026-01-06T00:06:17.191" v="1912"/>
+    <pc:docChg chg="undo custSel addSld delSld modSld sldOrd">
+      <pc:chgData name="Cristian Rubio" userId="8dd58e6179b8f369" providerId="LiveId" clId="{C275EF3F-3B15-4401-B7B1-2B7E8C84C799}" dt="2026-01-06T15:11:31.741" v="1989"/>
       <pc:docMkLst>
         <pc:docMk/>
       </pc:docMkLst>
@@ -299,7 +306,7 @@
         </pc:picChg>
       </pc:sldChg>
       <pc:sldChg chg="addSp delSp modSp add mod modTransition">
-        <pc:chgData name="Cristian Rubio" userId="8dd58e6179b8f369" providerId="LiveId" clId="{C275EF3F-3B15-4401-B7B1-2B7E8C84C799}" dt="2026-01-06T00:05:39.540" v="1904"/>
+        <pc:chgData name="Cristian Rubio" userId="8dd58e6179b8f369" providerId="LiveId" clId="{C275EF3F-3B15-4401-B7B1-2B7E8C84C799}" dt="2026-01-06T14:40:03.595" v="1965" actId="255"/>
         <pc:sldMkLst>
           <pc:docMk/>
           <pc:sldMk cId="3081850809" sldId="257"/>
@@ -329,7 +336,7 @@
           </ac:spMkLst>
         </pc:spChg>
         <pc:graphicFrameChg chg="add mod modGraphic">
-          <ac:chgData name="Cristian Rubio" userId="8dd58e6179b8f369" providerId="LiveId" clId="{C275EF3F-3B15-4401-B7B1-2B7E8C84C799}" dt="2026-01-05T22:29:42.273" v="1459" actId="1076"/>
+          <ac:chgData name="Cristian Rubio" userId="8dd58e6179b8f369" providerId="LiveId" clId="{C275EF3F-3B15-4401-B7B1-2B7E8C84C799}" dt="2026-01-06T14:40:03.595" v="1965" actId="255"/>
           <ac:graphicFrameMkLst>
             <pc:docMk/>
             <pc:sldMk cId="3081850809" sldId="257"/>
@@ -361,7 +368,7 @@
           </ac:graphicFrameMkLst>
         </pc:graphicFrameChg>
         <pc:graphicFrameChg chg="add mod modGraphic">
-          <ac:chgData name="Cristian Rubio" userId="8dd58e6179b8f369" providerId="LiveId" clId="{C275EF3F-3B15-4401-B7B1-2B7E8C84C799}" dt="2026-01-05T22:29:45.892" v="1460" actId="1076"/>
+          <ac:chgData name="Cristian Rubio" userId="8dd58e6179b8f369" providerId="LiveId" clId="{C275EF3F-3B15-4401-B7B1-2B7E8C84C799}" dt="2026-01-06T03:43:55.147" v="1944" actId="20577"/>
           <ac:graphicFrameMkLst>
             <pc:docMk/>
             <pc:sldMk cId="3081850809" sldId="257"/>
@@ -1024,6 +1031,116 @@
             <ac:picMk id="8198" creationId="{808BACF7-959B-876C-D91B-FE8FD5854E19}"/>
           </ac:picMkLst>
         </pc:picChg>
+      </pc:sldChg>
+      <pc:sldChg chg="addSp delSp modSp add mod">
+        <pc:chgData name="Cristian Rubio" userId="8dd58e6179b8f369" providerId="LiveId" clId="{C275EF3F-3B15-4401-B7B1-2B7E8C84C799}" dt="2026-01-06T04:16:11.989" v="1962" actId="1076"/>
+        <pc:sldMkLst>
+          <pc:docMk/>
+          <pc:sldMk cId="150633325" sldId="264"/>
+        </pc:sldMkLst>
+        <pc:spChg chg="mod">
+          <ac:chgData name="Cristian Rubio" userId="8dd58e6179b8f369" providerId="LiveId" clId="{C275EF3F-3B15-4401-B7B1-2B7E8C84C799}" dt="2026-01-06T04:10:15.141" v="1951" actId="20577"/>
+          <ac:spMkLst>
+            <pc:docMk/>
+            <pc:sldMk cId="150633325" sldId="264"/>
+            <ac:spMk id="2" creationId="{211F5934-B41B-DDA7-C758-AACBB0FB32DB}"/>
+          </ac:spMkLst>
+        </pc:spChg>
+        <pc:spChg chg="del">
+          <ac:chgData name="Cristian Rubio" userId="8dd58e6179b8f369" providerId="LiveId" clId="{C275EF3F-3B15-4401-B7B1-2B7E8C84C799}" dt="2026-01-06T04:10:18.211" v="1952" actId="478"/>
+          <ac:spMkLst>
+            <pc:docMk/>
+            <pc:sldMk cId="150633325" sldId="264"/>
+            <ac:spMk id="9" creationId="{9C954FDB-5467-4D92-119A-9ADEF421E366}"/>
+          </ac:spMkLst>
+        </pc:spChg>
+        <pc:spChg chg="del">
+          <ac:chgData name="Cristian Rubio" userId="8dd58e6179b8f369" providerId="LiveId" clId="{C275EF3F-3B15-4401-B7B1-2B7E8C84C799}" dt="2026-01-06T04:10:19.791" v="1953" actId="478"/>
+          <ac:spMkLst>
+            <pc:docMk/>
+            <pc:sldMk cId="150633325" sldId="264"/>
+            <ac:spMk id="11" creationId="{FC4550D4-68DF-C1CD-7BE7-5279EE27FC38}"/>
+          </ac:spMkLst>
+        </pc:spChg>
+        <pc:picChg chg="add mod">
+          <ac:chgData name="Cristian Rubio" userId="8dd58e6179b8f369" providerId="LiveId" clId="{C275EF3F-3B15-4401-B7B1-2B7E8C84C799}" dt="2026-01-06T04:16:11.989" v="1962" actId="1076"/>
+          <ac:picMkLst>
+            <pc:docMk/>
+            <pc:sldMk cId="150633325" sldId="264"/>
+            <ac:picMk id="3" creationId="{3B2D2435-B5B8-C41B-C939-B620C3FDA803}"/>
+          </ac:picMkLst>
+        </pc:picChg>
+        <pc:picChg chg="del">
+          <ac:chgData name="Cristian Rubio" userId="8dd58e6179b8f369" providerId="LiveId" clId="{C275EF3F-3B15-4401-B7B1-2B7E8C84C799}" dt="2026-01-06T04:10:20.535" v="1954" actId="478"/>
+          <ac:picMkLst>
+            <pc:docMk/>
+            <pc:sldMk cId="150633325" sldId="264"/>
+            <ac:picMk id="2050" creationId="{A55D73DC-1FD0-BE56-8ECC-0AB756378E99}"/>
+          </ac:picMkLst>
+        </pc:picChg>
+        <pc:picChg chg="del">
+          <ac:chgData name="Cristian Rubio" userId="8dd58e6179b8f369" providerId="LiveId" clId="{C275EF3F-3B15-4401-B7B1-2B7E8C84C799}" dt="2026-01-06T04:10:21.006" v="1955" actId="478"/>
+          <ac:picMkLst>
+            <pc:docMk/>
+            <pc:sldMk cId="150633325" sldId="264"/>
+            <ac:picMk id="2052" creationId="{7A5E335E-F254-A267-7905-CF07F4D95EB9}"/>
+          </ac:picMkLst>
+        </pc:picChg>
+      </pc:sldChg>
+      <pc:sldChg chg="delSp modSp add mod ord">
+        <pc:chgData name="Cristian Rubio" userId="8dd58e6179b8f369" providerId="LiveId" clId="{C275EF3F-3B15-4401-B7B1-2B7E8C84C799}" dt="2026-01-06T15:11:31.741" v="1989"/>
+        <pc:sldMkLst>
+          <pc:docMk/>
+          <pc:sldMk cId="2869853494" sldId="265"/>
+        </pc:sldMkLst>
+        <pc:spChg chg="mod">
+          <ac:chgData name="Cristian Rubio" userId="8dd58e6179b8f369" providerId="LiveId" clId="{C275EF3F-3B15-4401-B7B1-2B7E8C84C799}" dt="2026-01-06T15:08:05.861" v="1987" actId="1076"/>
+          <ac:spMkLst>
+            <pc:docMk/>
+            <pc:sldMk cId="2869853494" sldId="265"/>
+            <ac:spMk id="2" creationId="{DBE5B8EE-1695-12C8-012C-632DF4E241DE}"/>
+          </ac:spMkLst>
+        </pc:spChg>
+        <pc:graphicFrameChg chg="del">
+          <ac:chgData name="Cristian Rubio" userId="8dd58e6179b8f369" providerId="LiveId" clId="{C275EF3F-3B15-4401-B7B1-2B7E8C84C799}" dt="2026-01-06T15:07:47.227" v="1971" actId="478"/>
+          <ac:graphicFrameMkLst>
+            <pc:docMk/>
+            <pc:sldMk cId="2869853494" sldId="265"/>
+            <ac:graphicFrameMk id="4" creationId="{052C4158-325B-4A54-3948-E75A19021103}"/>
+          </ac:graphicFrameMkLst>
+        </pc:graphicFrameChg>
+        <pc:graphicFrameChg chg="del">
+          <ac:chgData name="Cristian Rubio" userId="8dd58e6179b8f369" providerId="LiveId" clId="{C275EF3F-3B15-4401-B7B1-2B7E8C84C799}" dt="2026-01-06T15:07:41.488" v="1967" actId="478"/>
+          <ac:graphicFrameMkLst>
+            <pc:docMk/>
+            <pc:sldMk cId="2869853494" sldId="265"/>
+            <ac:graphicFrameMk id="9" creationId="{AC3C64FC-A346-FD0F-85AB-17334A9A08C0}"/>
+          </ac:graphicFrameMkLst>
+        </pc:graphicFrameChg>
+        <pc:graphicFrameChg chg="del">
+          <ac:chgData name="Cristian Rubio" userId="8dd58e6179b8f369" providerId="LiveId" clId="{C275EF3F-3B15-4401-B7B1-2B7E8C84C799}" dt="2026-01-06T15:07:42.962" v="1968" actId="478"/>
+          <ac:graphicFrameMkLst>
+            <pc:docMk/>
+            <pc:sldMk cId="2869853494" sldId="265"/>
+            <ac:graphicFrameMk id="10" creationId="{03C67D1C-1680-931A-36A8-BC8B7254E5E4}"/>
+          </ac:graphicFrameMkLst>
+        </pc:graphicFrameChg>
+        <pc:graphicFrameChg chg="del">
+          <ac:chgData name="Cristian Rubio" userId="8dd58e6179b8f369" providerId="LiveId" clId="{C275EF3F-3B15-4401-B7B1-2B7E8C84C799}" dt="2026-01-06T15:07:44.346" v="1969" actId="478"/>
+          <ac:graphicFrameMkLst>
+            <pc:docMk/>
+            <pc:sldMk cId="2869853494" sldId="265"/>
+            <ac:graphicFrameMk id="11" creationId="{E1690E01-1CBF-308B-DE2E-3233DE29FABE}"/>
+          </ac:graphicFrameMkLst>
+        </pc:graphicFrameChg>
+        <pc:graphicFrameChg chg="del">
+          <ac:chgData name="Cristian Rubio" userId="8dd58e6179b8f369" providerId="LiveId" clId="{C275EF3F-3B15-4401-B7B1-2B7E8C84C799}" dt="2026-01-06T15:07:45.865" v="1970" actId="478"/>
+          <ac:graphicFrameMkLst>
+            <pc:docMk/>
+            <pc:sldMk cId="2869853494" sldId="265"/>
+            <ac:graphicFrameMk id="12" creationId="{97A597CF-D892-7905-5010-5694D417B716}"/>
+          </ac:graphicFrameMkLst>
+        </pc:graphicFrameChg>
       </pc:sldChg>
     </pc:docChg>
   </pc:docChgLst>
@@ -1179,7 +1296,7 @@
           <a:p>
             <a:fld id="{6ECD09ED-EEBF-453B-83C5-1581437C8389}" type="datetimeFigureOut">
               <a:rPr lang="es-CO" smtClean="0"/>
-              <a:t>5/01/2026</a:t>
+              <a:t>6/01/2026</a:t>
             </a:fld>
             <a:endParaRPr lang="es-CO"/>
           </a:p>
@@ -1379,7 +1496,7 @@
           <a:p>
             <a:fld id="{6ECD09ED-EEBF-453B-83C5-1581437C8389}" type="datetimeFigureOut">
               <a:rPr lang="es-CO" smtClean="0"/>
-              <a:t>5/01/2026</a:t>
+              <a:t>6/01/2026</a:t>
             </a:fld>
             <a:endParaRPr lang="es-CO"/>
           </a:p>
@@ -1589,7 +1706,7 @@
           <a:p>
             <a:fld id="{6ECD09ED-EEBF-453B-83C5-1581437C8389}" type="datetimeFigureOut">
               <a:rPr lang="es-CO" smtClean="0"/>
-              <a:t>5/01/2026</a:t>
+              <a:t>6/01/2026</a:t>
             </a:fld>
             <a:endParaRPr lang="es-CO"/>
           </a:p>
@@ -1789,7 +1906,7 @@
           <a:p>
             <a:fld id="{6ECD09ED-EEBF-453B-83C5-1581437C8389}" type="datetimeFigureOut">
               <a:rPr lang="es-CO" smtClean="0"/>
-              <a:t>5/01/2026</a:t>
+              <a:t>6/01/2026</a:t>
             </a:fld>
             <a:endParaRPr lang="es-CO"/>
           </a:p>
@@ -2065,7 +2182,7 @@
           <a:p>
             <a:fld id="{6ECD09ED-EEBF-453B-83C5-1581437C8389}" type="datetimeFigureOut">
               <a:rPr lang="es-CO" smtClean="0"/>
-              <a:t>5/01/2026</a:t>
+              <a:t>6/01/2026</a:t>
             </a:fld>
             <a:endParaRPr lang="es-CO"/>
           </a:p>
@@ -2333,7 +2450,7 @@
           <a:p>
             <a:fld id="{6ECD09ED-EEBF-453B-83C5-1581437C8389}" type="datetimeFigureOut">
               <a:rPr lang="es-CO" smtClean="0"/>
-              <a:t>5/01/2026</a:t>
+              <a:t>6/01/2026</a:t>
             </a:fld>
             <a:endParaRPr lang="es-CO"/>
           </a:p>
@@ -2748,7 +2865,7 @@
           <a:p>
             <a:fld id="{6ECD09ED-EEBF-453B-83C5-1581437C8389}" type="datetimeFigureOut">
               <a:rPr lang="es-CO" smtClean="0"/>
-              <a:t>5/01/2026</a:t>
+              <a:t>6/01/2026</a:t>
             </a:fld>
             <a:endParaRPr lang="es-CO"/>
           </a:p>
@@ -2890,7 +3007,7 @@
           <a:p>
             <a:fld id="{6ECD09ED-EEBF-453B-83C5-1581437C8389}" type="datetimeFigureOut">
               <a:rPr lang="es-CO" smtClean="0"/>
-              <a:t>5/01/2026</a:t>
+              <a:t>6/01/2026</a:t>
             </a:fld>
             <a:endParaRPr lang="es-CO"/>
           </a:p>
@@ -3003,7 +3120,7 @@
           <a:p>
             <a:fld id="{6ECD09ED-EEBF-453B-83C5-1581437C8389}" type="datetimeFigureOut">
               <a:rPr lang="es-CO" smtClean="0"/>
-              <a:t>5/01/2026</a:t>
+              <a:t>6/01/2026</a:t>
             </a:fld>
             <a:endParaRPr lang="es-CO"/>
           </a:p>
@@ -3316,7 +3433,7 @@
           <a:p>
             <a:fld id="{6ECD09ED-EEBF-453B-83C5-1581437C8389}" type="datetimeFigureOut">
               <a:rPr lang="es-CO" smtClean="0"/>
-              <a:t>5/01/2026</a:t>
+              <a:t>6/01/2026</a:t>
             </a:fld>
             <a:endParaRPr lang="es-CO"/>
           </a:p>
@@ -3605,7 +3722,7 @@
           <a:p>
             <a:fld id="{6ECD09ED-EEBF-453B-83C5-1581437C8389}" type="datetimeFigureOut">
               <a:rPr lang="es-CO" smtClean="0"/>
-              <a:t>5/01/2026</a:t>
+              <a:t>6/01/2026</a:t>
             </a:fld>
             <a:endParaRPr lang="es-CO"/>
           </a:p>
@@ -3848,7 +3965,7 @@
           <a:p>
             <a:fld id="{6ECD09ED-EEBF-453B-83C5-1581437C8389}" type="datetimeFigureOut">
               <a:rPr lang="es-CO" smtClean="0"/>
-              <a:t>5/01/2026</a:t>
+              <a:t>6/01/2026</a:t>
             </a:fld>
             <a:endParaRPr lang="es-CO"/>
           </a:p>
@@ -4502,18 +4619,18 @@
   <p:clrMapOvr>
     <a:masterClrMapping/>
   </p:clrMapOvr>
-  <mc:AlternateContent xmlns:mc="http://schemas.openxmlformats.org/markup-compatibility/2006">
-    <mc:Choice xmlns:p14="http://schemas.microsoft.com/office/powerpoint/2010/main" Requires="p14">
+  <mc:AlternateContent xmlns:mc="http://schemas.openxmlformats.org/markup-compatibility/2006" xmlns:p14="http://schemas.microsoft.com/office/powerpoint/2010/main">
+    <mc:Choice Requires="p14">
       <p:transition p14:dur="10"/>
     </mc:Choice>
-    <mc:Fallback>
+    <mc:Fallback xmlns="">
       <p:transition/>
     </mc:Fallback>
   </mc:AlternateContent>
 </p:sld>
 </file>
 
-<file path=ppt/slides/slide2.xml><?xml version="1.0" encoding="utf-8"?>
+<file path=ppt/slides/slide10.xml><?xml version="1.0" encoding="utf-8"?>
 <p:sld xmlns:a="http://schemas.openxmlformats.org/drawingml/2006/main" xmlns:r="http://schemas.openxmlformats.org/officeDocument/2006/relationships" xmlns:p="http://schemas.openxmlformats.org/presentationml/2006/main">
   <p:cSld>
     <p:spTree>
@@ -4521,7 +4638,7 @@
         <p:cNvPr id="1" name="">
           <a:extLst>
             <a:ext uri="{FF2B5EF4-FFF2-40B4-BE49-F238E27FC236}">
-              <a16:creationId xmlns:a16="http://schemas.microsoft.com/office/drawing/2014/main" id="{14840529-9E9F-68C6-3A6E-11DB77D59BFF}"/>
+              <a16:creationId xmlns:a16="http://schemas.microsoft.com/office/drawing/2014/main" id="{BB3C06AF-9013-9E12-12F3-CF14807C603D}"/>
             </a:ext>
           </a:extLst>
         </p:cNvPr>
@@ -4541,7 +4658,287 @@
           <p:cNvPr id="5" name="Picture 2" descr="Trabajar en Bextechnology S.A.S Colombia - Información Laboral Enero 2026">
             <a:extLst>
               <a:ext uri="{FF2B5EF4-FFF2-40B4-BE49-F238E27FC236}">
-                <a16:creationId xmlns:a16="http://schemas.microsoft.com/office/drawing/2014/main" id="{C268E41E-8F44-D675-F9C5-1C9BD76CC6BB}"/>
+                <a16:creationId xmlns:a16="http://schemas.microsoft.com/office/drawing/2014/main" id="{E79D1214-D249-88F4-C9BD-8776CABDB692}"/>
+              </a:ext>
+            </a:extLst>
+          </p:cNvPr>
+          <p:cNvPicPr>
+            <a:picLocks noChangeAspect="1" noChangeArrowheads="1"/>
+          </p:cNvPicPr>
+          <p:nvPr/>
+        </p:nvPicPr>
+        <p:blipFill rotWithShape="1">
+          <a:blip r:embed="rId2">
+            <a:extLst>
+              <a:ext uri="{28A0092B-C50C-407E-A947-70E740481C1C}">
+                <a14:useLocalDpi xmlns:a14="http://schemas.microsoft.com/office/drawing/2010/main" val="0"/>
+              </a:ext>
+            </a:extLst>
+          </a:blip>
+          <a:srcRect l="82184" b="66439"/>
+          <a:stretch>
+            <a:fillRect/>
+          </a:stretch>
+        </p:blipFill>
+        <p:spPr bwMode="auto">
+          <a:xfrm rot="5400000">
+            <a:off x="5376000" y="-5069996"/>
+            <a:ext cx="1440000" cy="12192000"/>
+          </a:xfrm>
+          <a:prstGeom prst="rect">
+            <a:avLst/>
+          </a:prstGeom>
+          <a:noFill/>
+          <a:extLst>
+            <a:ext uri="{909E8E84-426E-40DD-AFC4-6F175D3DCCD1}">
+              <a14:hiddenFill xmlns:a14="http://schemas.microsoft.com/office/drawing/2010/main">
+                <a:solidFill>
+                  <a:srgbClr val="FFFFFF"/>
+                </a:solidFill>
+              </a14:hiddenFill>
+            </a:ext>
+          </a:extLst>
+        </p:spPr>
+      </p:pic>
+      <p:pic>
+        <p:nvPicPr>
+          <p:cNvPr id="7" name="Picture 2" descr="Trabajar en Bextechnology S.A.S Colombia - Información Laboral Enero 2026">
+            <a:extLst>
+              <a:ext uri="{FF2B5EF4-FFF2-40B4-BE49-F238E27FC236}">
+                <a16:creationId xmlns:a16="http://schemas.microsoft.com/office/drawing/2014/main" id="{EA09F6E6-C70A-15BA-AE62-8A1857F9BE82}"/>
+              </a:ext>
+            </a:extLst>
+          </p:cNvPr>
+          <p:cNvPicPr>
+            <a:picLocks noChangeAspect="1" noChangeArrowheads="1"/>
+          </p:cNvPicPr>
+          <p:nvPr/>
+        </p:nvPicPr>
+        <p:blipFill rotWithShape="1">
+          <a:blip r:embed="rId2">
+            <a:extLst>
+              <a:ext uri="{28A0092B-C50C-407E-A947-70E740481C1C}">
+                <a14:useLocalDpi xmlns:a14="http://schemas.microsoft.com/office/drawing/2010/main" val="0"/>
+              </a:ext>
+            </a:extLst>
+          </a:blip>
+          <a:srcRect l="82184" b="66439"/>
+          <a:stretch>
+            <a:fillRect/>
+          </a:stretch>
+        </p:blipFill>
+        <p:spPr bwMode="auto">
+          <a:xfrm>
+            <a:off x="273381" y="0"/>
+            <a:ext cx="1440000" cy="6904780"/>
+          </a:xfrm>
+          <a:prstGeom prst="rect">
+            <a:avLst/>
+          </a:prstGeom>
+          <a:noFill/>
+          <a:extLst>
+            <a:ext uri="{909E8E84-426E-40DD-AFC4-6F175D3DCCD1}">
+              <a14:hiddenFill xmlns:a14="http://schemas.microsoft.com/office/drawing/2010/main">
+                <a:solidFill>
+                  <a:srgbClr val="FFFFFF"/>
+                </a:solidFill>
+              </a14:hiddenFill>
+            </a:ext>
+          </a:extLst>
+        </p:spPr>
+      </p:pic>
+      <p:sp>
+        <p:nvSpPr>
+          <p:cNvPr id="2" name="Title 1">
+            <a:extLst>
+              <a:ext uri="{FF2B5EF4-FFF2-40B4-BE49-F238E27FC236}">
+                <a16:creationId xmlns:a16="http://schemas.microsoft.com/office/drawing/2014/main" id="{A6F47778-BD5D-AA9F-C410-0DDCCB761B0B}"/>
+              </a:ext>
+            </a:extLst>
+          </p:cNvPr>
+          <p:cNvSpPr>
+            <a:spLocks noGrp="1"/>
+          </p:cNvSpPr>
+          <p:nvPr>
+            <p:ph type="ctrTitle"/>
+          </p:nvPr>
+        </p:nvSpPr>
+        <p:spPr>
+          <a:xfrm>
+            <a:off x="2471693" y="2052008"/>
+            <a:ext cx="8729472" cy="824410"/>
+          </a:xfrm>
+        </p:spPr>
+        <p:txBody>
+          <a:bodyPr>
+            <a:normAutofit/>
+          </a:bodyPr>
+          <a:lstStyle/>
+          <a:p>
+            <a:r>
+              <a:rPr lang="es-MX" sz="4800" dirty="0">
+                <a:solidFill>
+                  <a:srgbClr val="8A0000"/>
+                </a:solidFill>
+              </a:rPr>
+              <a:t>Vamos a verlo</a:t>
+            </a:r>
+            <a:endParaRPr lang="es-CO" sz="4800" dirty="0">
+              <a:solidFill>
+                <a:srgbClr val="8A0000"/>
+              </a:solidFill>
+            </a:endParaRPr>
+          </a:p>
+        </p:txBody>
+      </p:sp>
+      <p:pic>
+        <p:nvPicPr>
+          <p:cNvPr id="1026" name="Picture 2" descr="Trabajar en Bextechnology S.A.S Colombia - Información Laboral Enero 2026">
+            <a:extLst>
+              <a:ext uri="{FF2B5EF4-FFF2-40B4-BE49-F238E27FC236}">
+                <a16:creationId xmlns:a16="http://schemas.microsoft.com/office/drawing/2014/main" id="{871A5554-38F2-E775-1DD1-D834F87AF224}"/>
+              </a:ext>
+            </a:extLst>
+          </p:cNvPr>
+          <p:cNvPicPr>
+            <a:picLocks noChangeAspect="1" noChangeArrowheads="1"/>
+          </p:cNvPicPr>
+          <p:nvPr/>
+        </p:nvPicPr>
+        <p:blipFill>
+          <a:blip r:embed="rId2">
+            <a:extLst>
+              <a:ext uri="{28A0092B-C50C-407E-A947-70E740481C1C}">
+                <a14:useLocalDpi xmlns:a14="http://schemas.microsoft.com/office/drawing/2010/main" val="0"/>
+              </a:ext>
+            </a:extLst>
+          </a:blip>
+          <a:srcRect/>
+          <a:stretch>
+            <a:fillRect/>
+          </a:stretch>
+        </p:blipFill>
+        <p:spPr bwMode="auto">
+          <a:xfrm>
+            <a:off x="463029" y="495652"/>
+            <a:ext cx="1060704" cy="1060704"/>
+          </a:xfrm>
+          <a:prstGeom prst="rect">
+            <a:avLst/>
+          </a:prstGeom>
+          <a:noFill/>
+          <a:extLst>
+            <a:ext uri="{909E8E84-426E-40DD-AFC4-6F175D3DCCD1}">
+              <a14:hiddenFill xmlns:a14="http://schemas.microsoft.com/office/drawing/2010/main">
+                <a:solidFill>
+                  <a:srgbClr val="FFFFFF"/>
+                </a:solidFill>
+              </a14:hiddenFill>
+            </a:ext>
+          </a:extLst>
+        </p:spPr>
+      </p:pic>
+      <p:pic>
+        <p:nvPicPr>
+          <p:cNvPr id="8198" name="Picture 6" descr="Codigo programacion concepto: Más de 90,725 ilustraciones y dibujos de  stock con licencia libres de regalías | Shutterstock">
+            <a:extLst>
+              <a:ext uri="{FF2B5EF4-FFF2-40B4-BE49-F238E27FC236}">
+                <a16:creationId xmlns:a16="http://schemas.microsoft.com/office/drawing/2014/main" id="{808BACF7-959B-876C-D91B-FE8FD5854E19}"/>
+              </a:ext>
+            </a:extLst>
+          </p:cNvPr>
+          <p:cNvPicPr>
+            <a:picLocks noChangeAspect="1" noChangeArrowheads="1"/>
+          </p:cNvPicPr>
+          <p:nvPr/>
+        </p:nvPicPr>
+        <p:blipFill>
+          <a:blip r:embed="rId3">
+            <a:extLst>
+              <a:ext uri="{28A0092B-C50C-407E-A947-70E740481C1C}">
+                <a14:useLocalDpi xmlns:a14="http://schemas.microsoft.com/office/drawing/2010/main" val="0"/>
+              </a:ext>
+            </a:extLst>
+          </a:blip>
+          <a:srcRect/>
+          <a:stretch>
+            <a:fillRect/>
+          </a:stretch>
+        </p:blipFill>
+        <p:spPr bwMode="auto">
+          <a:xfrm>
+            <a:off x="4474991" y="2876418"/>
+            <a:ext cx="4722876" cy="3542157"/>
+          </a:xfrm>
+          <a:prstGeom prst="rect">
+            <a:avLst/>
+          </a:prstGeom>
+          <a:noFill/>
+          <a:extLst>
+            <a:ext uri="{909E8E84-426E-40DD-AFC4-6F175D3DCCD1}">
+              <a14:hiddenFill xmlns:a14="http://schemas.microsoft.com/office/drawing/2010/main">
+                <a:solidFill>
+                  <a:srgbClr val="FFFFFF"/>
+                </a:solidFill>
+              </a14:hiddenFill>
+            </a:ext>
+          </a:extLst>
+        </p:spPr>
+      </p:pic>
+    </p:spTree>
+    <p:extLst>
+      <p:ext uri="{BB962C8B-B14F-4D97-AF65-F5344CB8AC3E}">
+        <p14:creationId xmlns:p14="http://schemas.microsoft.com/office/powerpoint/2010/main" val="2021524294"/>
+      </p:ext>
+    </p:extLst>
+  </p:cSld>
+  <p:clrMapOvr>
+    <a:masterClrMapping/>
+  </p:clrMapOvr>
+  <mc:AlternateContent xmlns:mc="http://schemas.openxmlformats.org/markup-compatibility/2006" xmlns:p159="http://schemas.microsoft.com/office/powerpoint/2015/09/main">
+    <mc:Choice Requires="p159">
+      <p:transition xmlns:p14="http://schemas.microsoft.com/office/powerpoint/2010/main" spd="slow" p14:dur="2000">
+        <p159:morph option="byObject"/>
+      </p:transition>
+    </mc:Choice>
+    <mc:Fallback xmlns="">
+      <p:transition spd="slow">
+        <p:fade/>
+      </p:transition>
+    </mc:Fallback>
+  </mc:AlternateContent>
+</p:sld>
+</file>
+
+<file path=ppt/slides/slide2.xml><?xml version="1.0" encoding="utf-8"?>
+<p:sld xmlns:a="http://schemas.openxmlformats.org/drawingml/2006/main" xmlns:r="http://schemas.openxmlformats.org/officeDocument/2006/relationships" xmlns:p="http://schemas.openxmlformats.org/presentationml/2006/main">
+  <p:cSld>
+    <p:spTree>
+      <p:nvGrpSpPr>
+        <p:cNvPr id="1" name="">
+          <a:extLst>
+            <a:ext uri="{FF2B5EF4-FFF2-40B4-BE49-F238E27FC236}">
+              <a16:creationId xmlns:a16="http://schemas.microsoft.com/office/drawing/2014/main" id="{68A384AD-5D59-42C8-CA19-2B6270A88E02}"/>
+            </a:ext>
+          </a:extLst>
+        </p:cNvPr>
+        <p:cNvGrpSpPr/>
+        <p:nvPr/>
+      </p:nvGrpSpPr>
+      <p:grpSpPr>
+        <a:xfrm>
+          <a:off x="0" y="0"/>
+          <a:ext cx="0" cy="0"/>
+          <a:chOff x="0" y="0"/>
+          <a:chExt cx="0" cy="0"/>
+        </a:xfrm>
+      </p:grpSpPr>
+      <p:pic>
+        <p:nvPicPr>
+          <p:cNvPr id="5" name="Picture 2" descr="Trabajar en Bextechnology S.A.S Colombia - Información Laboral Enero 2026">
+            <a:extLst>
+              <a:ext uri="{FF2B5EF4-FFF2-40B4-BE49-F238E27FC236}">
+                <a16:creationId xmlns:a16="http://schemas.microsoft.com/office/drawing/2014/main" id="{02871578-D565-9AE1-E202-52FAB4AE7BB2}"/>
               </a:ext>
             </a:extLst>
           </p:cNvPr>
@@ -4588,7 +4985,7 @@
           <p:cNvPr id="7" name="Picture 2" descr="Trabajar en Bextechnology S.A.S Colombia - Información Laboral Enero 2026">
             <a:extLst>
               <a:ext uri="{FF2B5EF4-FFF2-40B4-BE49-F238E27FC236}">
-                <a16:creationId xmlns:a16="http://schemas.microsoft.com/office/drawing/2014/main" id="{766D80F1-A1BC-7667-EB2B-886B6D4828A1}"/>
+                <a16:creationId xmlns:a16="http://schemas.microsoft.com/office/drawing/2014/main" id="{F815C5F5-7BD3-3D40-13F0-6D990E76F6B5}"/>
               </a:ext>
             </a:extLst>
           </p:cNvPr>
@@ -4635,6 +5032,234 @@
           <p:cNvPr id="2" name="Title 1">
             <a:extLst>
               <a:ext uri="{FF2B5EF4-FFF2-40B4-BE49-F238E27FC236}">
+                <a16:creationId xmlns:a16="http://schemas.microsoft.com/office/drawing/2014/main" id="{DBE5B8EE-1695-12C8-012C-632DF4E241DE}"/>
+              </a:ext>
+            </a:extLst>
+          </p:cNvPr>
+          <p:cNvSpPr>
+            <a:spLocks noGrp="1"/>
+          </p:cNvSpPr>
+          <p:nvPr>
+            <p:ph type="ctrTitle"/>
+          </p:nvPr>
+        </p:nvSpPr>
+        <p:spPr>
+          <a:xfrm>
+            <a:off x="771847" y="2279545"/>
+            <a:ext cx="8729472" cy="824410"/>
+          </a:xfrm>
+        </p:spPr>
+        <p:txBody>
+          <a:bodyPr>
+            <a:normAutofit/>
+          </a:bodyPr>
+          <a:lstStyle/>
+          <a:p>
+            <a:r>
+              <a:rPr lang="es-CO" sz="4800" dirty="0">
+                <a:solidFill>
+                  <a:srgbClr val="8A0000"/>
+                </a:solidFill>
+              </a:rPr>
+              <a:t>Prueba Teórica</a:t>
+            </a:r>
+          </a:p>
+        </p:txBody>
+      </p:sp>
+      <p:pic>
+        <p:nvPicPr>
+          <p:cNvPr id="1026" name="Picture 2" descr="Trabajar en Bextechnology S.A.S Colombia - Información Laboral Enero 2026">
+            <a:extLst>
+              <a:ext uri="{FF2B5EF4-FFF2-40B4-BE49-F238E27FC236}">
+                <a16:creationId xmlns:a16="http://schemas.microsoft.com/office/drawing/2014/main" id="{D77A33D0-D0DE-130C-B66E-25D334A7C0A9}"/>
+              </a:ext>
+            </a:extLst>
+          </p:cNvPr>
+          <p:cNvPicPr>
+            <a:picLocks noChangeAspect="1" noChangeArrowheads="1"/>
+          </p:cNvPicPr>
+          <p:nvPr/>
+        </p:nvPicPr>
+        <p:blipFill>
+          <a:blip r:embed="rId2">
+            <a:extLst>
+              <a:ext uri="{28A0092B-C50C-407E-A947-70E740481C1C}">
+                <a14:useLocalDpi xmlns:a14="http://schemas.microsoft.com/office/drawing/2010/main" val="0"/>
+              </a:ext>
+            </a:extLst>
+          </a:blip>
+          <a:srcRect/>
+          <a:stretch>
+            <a:fillRect/>
+          </a:stretch>
+        </p:blipFill>
+        <p:spPr bwMode="auto">
+          <a:xfrm>
+            <a:off x="10650384" y="5278668"/>
+            <a:ext cx="1060704" cy="1060704"/>
+          </a:xfrm>
+          <a:prstGeom prst="rect">
+            <a:avLst/>
+          </a:prstGeom>
+          <a:noFill/>
+          <a:extLst>
+            <a:ext uri="{909E8E84-426E-40DD-AFC4-6F175D3DCCD1}">
+              <a14:hiddenFill xmlns:a14="http://schemas.microsoft.com/office/drawing/2010/main">
+                <a:solidFill>
+                  <a:srgbClr val="FFFFFF"/>
+                </a:solidFill>
+              </a14:hiddenFill>
+            </a:ext>
+          </a:extLst>
+        </p:spPr>
+      </p:pic>
+    </p:spTree>
+    <p:extLst>
+      <p:ext uri="{BB962C8B-B14F-4D97-AF65-F5344CB8AC3E}">
+        <p14:creationId xmlns:p14="http://schemas.microsoft.com/office/powerpoint/2010/main" val="2869853494"/>
+      </p:ext>
+    </p:extLst>
+  </p:cSld>
+  <p:clrMapOvr>
+    <a:masterClrMapping/>
+  </p:clrMapOvr>
+  <mc:AlternateContent xmlns:mc="http://schemas.openxmlformats.org/markup-compatibility/2006" xmlns:p159="http://schemas.microsoft.com/office/powerpoint/2015/09/main">
+    <mc:Choice Requires="p159">
+      <p:transition xmlns:p14="http://schemas.microsoft.com/office/powerpoint/2010/main" spd="slow" p14:dur="2000">
+        <p159:morph option="byObject"/>
+      </p:transition>
+    </mc:Choice>
+    <mc:Fallback xmlns="">
+      <p:transition spd="slow">
+        <p:fade/>
+      </p:transition>
+    </mc:Fallback>
+  </mc:AlternateContent>
+</p:sld>
+</file>
+
+<file path=ppt/slides/slide3.xml><?xml version="1.0" encoding="utf-8"?>
+<p:sld xmlns:a="http://schemas.openxmlformats.org/drawingml/2006/main" xmlns:r="http://schemas.openxmlformats.org/officeDocument/2006/relationships" xmlns:p="http://schemas.openxmlformats.org/presentationml/2006/main">
+  <p:cSld>
+    <p:spTree>
+      <p:nvGrpSpPr>
+        <p:cNvPr id="1" name="">
+          <a:extLst>
+            <a:ext uri="{FF2B5EF4-FFF2-40B4-BE49-F238E27FC236}">
+              <a16:creationId xmlns:a16="http://schemas.microsoft.com/office/drawing/2014/main" id="{14840529-9E9F-68C6-3A6E-11DB77D59BFF}"/>
+            </a:ext>
+          </a:extLst>
+        </p:cNvPr>
+        <p:cNvGrpSpPr/>
+        <p:nvPr/>
+      </p:nvGrpSpPr>
+      <p:grpSpPr>
+        <a:xfrm>
+          <a:off x="0" y="0"/>
+          <a:ext cx="0" cy="0"/>
+          <a:chOff x="0" y="0"/>
+          <a:chExt cx="0" cy="0"/>
+        </a:xfrm>
+      </p:grpSpPr>
+      <p:pic>
+        <p:nvPicPr>
+          <p:cNvPr id="5" name="Picture 2" descr="Trabajar en Bextechnology S.A.S Colombia - Información Laboral Enero 2026">
+            <a:extLst>
+              <a:ext uri="{FF2B5EF4-FFF2-40B4-BE49-F238E27FC236}">
+                <a16:creationId xmlns:a16="http://schemas.microsoft.com/office/drawing/2014/main" id="{C268E41E-8F44-D675-F9C5-1C9BD76CC6BB}"/>
+              </a:ext>
+            </a:extLst>
+          </p:cNvPr>
+          <p:cNvPicPr>
+            <a:picLocks noChangeAspect="1" noChangeArrowheads="1"/>
+          </p:cNvPicPr>
+          <p:nvPr/>
+        </p:nvPicPr>
+        <p:blipFill rotWithShape="1">
+          <a:blip r:embed="rId2">
+            <a:extLst>
+              <a:ext uri="{28A0092B-C50C-407E-A947-70E740481C1C}">
+                <a14:useLocalDpi xmlns:a14="http://schemas.microsoft.com/office/drawing/2010/main" val="0"/>
+              </a:ext>
+            </a:extLst>
+          </a:blip>
+          <a:srcRect l="82184" b="66439"/>
+          <a:stretch>
+            <a:fillRect/>
+          </a:stretch>
+        </p:blipFill>
+        <p:spPr bwMode="auto">
+          <a:xfrm rot="5400000">
+            <a:off x="5376000" y="-286980"/>
+            <a:ext cx="1440000" cy="12192000"/>
+          </a:xfrm>
+          <a:prstGeom prst="rect">
+            <a:avLst/>
+          </a:prstGeom>
+          <a:noFill/>
+          <a:extLst>
+            <a:ext uri="{909E8E84-426E-40DD-AFC4-6F175D3DCCD1}">
+              <a14:hiddenFill xmlns:a14="http://schemas.microsoft.com/office/drawing/2010/main">
+                <a:solidFill>
+                  <a:srgbClr val="FFFFFF"/>
+                </a:solidFill>
+              </a14:hiddenFill>
+            </a:ext>
+          </a:extLst>
+        </p:spPr>
+      </p:pic>
+      <p:pic>
+        <p:nvPicPr>
+          <p:cNvPr id="7" name="Picture 2" descr="Trabajar en Bextechnology S.A.S Colombia - Información Laboral Enero 2026">
+            <a:extLst>
+              <a:ext uri="{FF2B5EF4-FFF2-40B4-BE49-F238E27FC236}">
+                <a16:creationId xmlns:a16="http://schemas.microsoft.com/office/drawing/2014/main" id="{766D80F1-A1BC-7667-EB2B-886B6D4828A1}"/>
+              </a:ext>
+            </a:extLst>
+          </p:cNvPr>
+          <p:cNvPicPr>
+            <a:picLocks noChangeAspect="1" noChangeArrowheads="1"/>
+          </p:cNvPicPr>
+          <p:nvPr/>
+        </p:nvPicPr>
+        <p:blipFill rotWithShape="1">
+          <a:blip r:embed="rId2">
+            <a:extLst>
+              <a:ext uri="{28A0092B-C50C-407E-A947-70E740481C1C}">
+                <a14:useLocalDpi xmlns:a14="http://schemas.microsoft.com/office/drawing/2010/main" val="0"/>
+              </a:ext>
+            </a:extLst>
+          </a:blip>
+          <a:srcRect l="82184" b="66439"/>
+          <a:stretch>
+            <a:fillRect/>
+          </a:stretch>
+        </p:blipFill>
+        <p:spPr bwMode="auto">
+          <a:xfrm>
+            <a:off x="10460736" y="0"/>
+            <a:ext cx="1440000" cy="6904780"/>
+          </a:xfrm>
+          <a:prstGeom prst="rect">
+            <a:avLst/>
+          </a:prstGeom>
+          <a:noFill/>
+          <a:extLst>
+            <a:ext uri="{909E8E84-426E-40DD-AFC4-6F175D3DCCD1}">
+              <a14:hiddenFill xmlns:a14="http://schemas.microsoft.com/office/drawing/2010/main">
+                <a:solidFill>
+                  <a:srgbClr val="FFFFFF"/>
+                </a:solidFill>
+              </a14:hiddenFill>
+            </a:ext>
+          </a:extLst>
+        </p:spPr>
+      </p:pic>
+      <p:sp>
+        <p:nvSpPr>
+          <p:cNvPr id="2" name="Title 1">
+            <a:extLst>
+              <a:ext uri="{FF2B5EF4-FFF2-40B4-BE49-F238E27FC236}">
                 <a16:creationId xmlns:a16="http://schemas.microsoft.com/office/drawing/2014/main" id="{8621EEEC-0DD8-BF75-3BD5-FDCB43487079}"/>
               </a:ext>
             </a:extLst>
@@ -4739,14 +5364,14 @@
           <p:nvPr>
             <p:extLst>
               <p:ext uri="{D42A27DB-BD31-4B8C-83A1-F6EECF244321}">
-                <p14:modId xmlns:p14="http://schemas.microsoft.com/office/powerpoint/2010/main" val="2057951068"/>
+                <p14:modId xmlns:p14="http://schemas.microsoft.com/office/powerpoint/2010/main" val="801767262"/>
               </p:ext>
             </p:extLst>
           </p:nvPr>
         </p:nvGraphicFramePr>
         <p:xfrm>
           <a:off x="2834989" y="2880132"/>
-          <a:ext cx="1712648" cy="1635760"/>
+          <a:ext cx="1712648" cy="1803400"/>
         </p:xfrm>
         <a:graphic>
           <a:graphicData uri="http://schemas.openxmlformats.org/drawingml/2006/table">
@@ -4851,6 +5476,24 @@
                         <a:rPr lang="es-CO" sz="1100" dirty="0"/>
                         <a:t>NPM 10.9.4</a:t>
                       </a:r>
+                    </a:p>
+                    <a:p>
+                      <a:pPr marL="285750" indent="-285750">
+                        <a:buFontTx/>
+                        <a:buChar char="-"/>
+                      </a:pPr>
+                      <a:r>
+                        <a:rPr lang="es-CO" sz="1100" kern="1200" dirty="0">
+                          <a:solidFill>
+                            <a:schemeClr val="dk1"/>
+                          </a:solidFill>
+                          <a:latin typeface="+mn-lt"/>
+                          <a:ea typeface="+mn-ea"/>
+                          <a:cs typeface="+mn-cs"/>
+                        </a:rPr>
+                        <a:t>sweetalert2</a:t>
+                      </a:r>
+                      <a:endParaRPr lang="es-CO" sz="1100" dirty="0"/>
                     </a:p>
                     <a:p>
                       <a:pPr marL="285750" indent="-285750">
@@ -5231,14 +5874,14 @@
           <p:nvPr>
             <p:extLst>
               <p:ext uri="{D42A27DB-BD31-4B8C-83A1-F6EECF244321}">
-                <p14:modId xmlns:p14="http://schemas.microsoft.com/office/powerpoint/2010/main" val="2580493901"/>
+                <p14:modId xmlns:p14="http://schemas.microsoft.com/office/powerpoint/2010/main" val="2595104281"/>
               </p:ext>
             </p:extLst>
           </p:nvPr>
         </p:nvGraphicFramePr>
         <p:xfrm>
           <a:off x="6260285" y="2885970"/>
-          <a:ext cx="1712648" cy="1132840"/>
+          <a:ext cx="1712648" cy="1635760"/>
         </p:xfrm>
         <a:graphic>
           <a:graphicData uri="http://schemas.openxmlformats.org/drawingml/2006/table">
@@ -5317,6 +5960,16 @@
                       </a:pPr>
                       <a:r>
                         <a:rPr lang="es-CO" sz="1100" dirty="0"/>
+                        <a:t>SQL Server Management Studio 22</a:t>
+                      </a:r>
+                    </a:p>
+                    <a:p>
+                      <a:pPr marL="285750" indent="-285750">
+                        <a:buFontTx/>
+                        <a:buChar char="-"/>
+                      </a:pPr>
+                      <a:r>
+                        <a:rPr lang="es-CO" sz="1100" dirty="0"/>
                         <a:t>Git</a:t>
                       </a:r>
                     </a:p>
@@ -5353,13 +6006,13 @@
   <p:clrMapOvr>
     <a:masterClrMapping/>
   </p:clrMapOvr>
-  <mc:AlternateContent xmlns:mc="http://schemas.openxmlformats.org/markup-compatibility/2006">
-    <mc:Choice xmlns:p159="http://schemas.microsoft.com/office/powerpoint/2015/09/main" Requires="p159">
+  <mc:AlternateContent xmlns:mc="http://schemas.openxmlformats.org/markup-compatibility/2006" xmlns:p159="http://schemas.microsoft.com/office/powerpoint/2015/09/main">
+    <mc:Choice Requires="p159">
       <p:transition xmlns:p14="http://schemas.microsoft.com/office/powerpoint/2010/main" spd="slow" p14:dur="2000">
         <p159:morph option="byObject"/>
       </p:transition>
     </mc:Choice>
-    <mc:Fallback>
+    <mc:Fallback xmlns="">
       <p:transition spd="slow">
         <p:fade/>
       </p:transition>
@@ -5368,7 +6021,7 @@
 </p:sld>
 </file>
 
-<file path=ppt/slides/slide3.xml><?xml version="1.0" encoding="utf-8"?>
+<file path=ppt/slides/slide4.xml><?xml version="1.0" encoding="utf-8"?>
 <p:sld xmlns:a="http://schemas.openxmlformats.org/drawingml/2006/main" xmlns:r="http://schemas.openxmlformats.org/officeDocument/2006/relationships" xmlns:p="http://schemas.openxmlformats.org/presentationml/2006/main">
   <p:cSld>
     <p:spTree>
@@ -6369,13 +7022,13 @@
   <p:clrMapOvr>
     <a:masterClrMapping/>
   </p:clrMapOvr>
-  <mc:AlternateContent xmlns:mc="http://schemas.openxmlformats.org/markup-compatibility/2006">
-    <mc:Choice xmlns:p159="http://schemas.microsoft.com/office/powerpoint/2015/09/main" Requires="p159">
+  <mc:AlternateContent xmlns:mc="http://schemas.openxmlformats.org/markup-compatibility/2006" xmlns:p159="http://schemas.microsoft.com/office/powerpoint/2015/09/main">
+    <mc:Choice Requires="p159">
       <p:transition xmlns:p14="http://schemas.microsoft.com/office/powerpoint/2010/main" spd="slow" p14:dur="2000">
         <p159:morph option="byObject"/>
       </p:transition>
     </mc:Choice>
-    <mc:Fallback>
+    <mc:Fallback xmlns="">
       <p:transition spd="slow">
         <p:fade/>
       </p:transition>
@@ -6384,7 +7037,7 @@
 </p:sld>
 </file>
 
-<file path=ppt/slides/slide4.xml><?xml version="1.0" encoding="utf-8"?>
+<file path=ppt/slides/slide5.xml><?xml version="1.0" encoding="utf-8"?>
 <p:sld xmlns:a="http://schemas.openxmlformats.org/drawingml/2006/main" xmlns:r="http://schemas.openxmlformats.org/officeDocument/2006/relationships" xmlns:p="http://schemas.openxmlformats.org/presentationml/2006/main">
   <p:cSld>
     <p:spTree>
@@ -6678,13 +7331,13 @@
   <p:clrMapOvr>
     <a:masterClrMapping/>
   </p:clrMapOvr>
-  <mc:AlternateContent xmlns:mc="http://schemas.openxmlformats.org/markup-compatibility/2006">
-    <mc:Choice xmlns:p159="http://schemas.microsoft.com/office/powerpoint/2015/09/main" Requires="p159">
+  <mc:AlternateContent xmlns:mc="http://schemas.openxmlformats.org/markup-compatibility/2006" xmlns:p159="http://schemas.microsoft.com/office/powerpoint/2015/09/main">
+    <mc:Choice Requires="p159">
       <p:transition xmlns:p14="http://schemas.microsoft.com/office/powerpoint/2010/main" spd="slow" p14:dur="2000">
         <p159:morph option="byObject"/>
       </p:transition>
     </mc:Choice>
-    <mc:Fallback>
+    <mc:Fallback xmlns="">
       <p:transition spd="slow">
         <p:fade/>
       </p:transition>
@@ -6693,7 +7346,7 @@
 </p:sld>
 </file>
 
-<file path=ppt/slides/slide5.xml><?xml version="1.0" encoding="utf-8"?>
+<file path=ppt/slides/slide6.xml><?xml version="1.0" encoding="utf-8"?>
 <p:sld xmlns:a="http://schemas.openxmlformats.org/drawingml/2006/main" xmlns:r="http://schemas.openxmlformats.org/officeDocument/2006/relationships" xmlns:p="http://schemas.openxmlformats.org/presentationml/2006/main">
   <p:cSld>
     <p:spTree>
@@ -6941,13 +7594,13 @@
   <p:clrMapOvr>
     <a:masterClrMapping/>
   </p:clrMapOvr>
-  <mc:AlternateContent xmlns:mc="http://schemas.openxmlformats.org/markup-compatibility/2006">
-    <mc:Choice xmlns:p159="http://schemas.microsoft.com/office/powerpoint/2015/09/main" Requires="p159">
+  <mc:AlternateContent xmlns:mc="http://schemas.openxmlformats.org/markup-compatibility/2006" xmlns:p159="http://schemas.microsoft.com/office/powerpoint/2015/09/main">
+    <mc:Choice Requires="p159">
       <p:transition xmlns:p14="http://schemas.microsoft.com/office/powerpoint/2010/main" spd="slow" p14:dur="2000">
         <p159:morph option="byObject"/>
       </p:transition>
     </mc:Choice>
-    <mc:Fallback>
+    <mc:Fallback xmlns="">
       <p:transition spd="slow">
         <p:fade/>
       </p:transition>
@@ -6956,7 +7609,7 @@
 </p:sld>
 </file>
 
-<file path=ppt/slides/slide6.xml><?xml version="1.0" encoding="utf-8"?>
+<file path=ppt/slides/slide7.xml><?xml version="1.0" encoding="utf-8"?>
 <p:sld xmlns:a="http://schemas.openxmlformats.org/drawingml/2006/main" xmlns:r="http://schemas.openxmlformats.org/officeDocument/2006/relationships" xmlns:p="http://schemas.openxmlformats.org/presentationml/2006/main">
   <p:cSld>
     <p:spTree>
@@ -7281,13 +7934,13 @@
   <p:clrMapOvr>
     <a:masterClrMapping/>
   </p:clrMapOvr>
-  <mc:AlternateContent xmlns:mc="http://schemas.openxmlformats.org/markup-compatibility/2006">
-    <mc:Choice xmlns:p159="http://schemas.microsoft.com/office/powerpoint/2015/09/main" Requires="p159">
+  <mc:AlternateContent xmlns:mc="http://schemas.openxmlformats.org/markup-compatibility/2006" xmlns:p159="http://schemas.microsoft.com/office/powerpoint/2015/09/main">
+    <mc:Choice Requires="p159">
       <p:transition xmlns:p14="http://schemas.microsoft.com/office/powerpoint/2010/main" spd="slow" p14:dur="2000">
         <p159:morph option="byObject"/>
       </p:transition>
     </mc:Choice>
-    <mc:Fallback>
+    <mc:Fallback xmlns="">
       <p:transition spd="slow">
         <p:fade/>
       </p:transition>
@@ -7296,7 +7949,7 @@
 </p:sld>
 </file>
 
-<file path=ppt/slides/slide7.xml><?xml version="1.0" encoding="utf-8"?>
+<file path=ppt/slides/slide8.xml><?xml version="1.0" encoding="utf-8"?>
 <p:sld xmlns:a="http://schemas.openxmlformats.org/drawingml/2006/main" xmlns:r="http://schemas.openxmlformats.org/officeDocument/2006/relationships" xmlns:p="http://schemas.openxmlformats.org/presentationml/2006/main">
   <p:cSld>
     <p:spTree>
@@ -7722,13 +8375,13 @@
   <p:clrMapOvr>
     <a:masterClrMapping/>
   </p:clrMapOvr>
-  <mc:AlternateContent xmlns:mc="http://schemas.openxmlformats.org/markup-compatibility/2006">
-    <mc:Choice xmlns:p159="http://schemas.microsoft.com/office/powerpoint/2015/09/main" Requires="p159">
+  <mc:AlternateContent xmlns:mc="http://schemas.openxmlformats.org/markup-compatibility/2006" xmlns:p159="http://schemas.microsoft.com/office/powerpoint/2015/09/main">
+    <mc:Choice Requires="p159">
       <p:transition xmlns:p14="http://schemas.microsoft.com/office/powerpoint/2010/main" spd="slow" p14:dur="2000">
         <p159:morph option="byObject"/>
       </p:transition>
     </mc:Choice>
-    <mc:Fallback>
+    <mc:Fallback xmlns="">
       <p:transition spd="slow">
         <p:fade/>
       </p:transition>
@@ -7737,7 +8390,7 @@
 </p:sld>
 </file>
 
-<file path=ppt/slides/slide8.xml><?xml version="1.0" encoding="utf-8"?>
+<file path=ppt/slides/slide9.xml><?xml version="1.0" encoding="utf-8"?>
 <p:sld xmlns:a="http://schemas.openxmlformats.org/drawingml/2006/main" xmlns:r="http://schemas.openxmlformats.org/officeDocument/2006/relationships" xmlns:p="http://schemas.openxmlformats.org/presentationml/2006/main">
   <p:cSld>
     <p:spTree>
@@ -7745,7 +8398,7 @@
         <p:cNvPr id="1" name="">
           <a:extLst>
             <a:ext uri="{FF2B5EF4-FFF2-40B4-BE49-F238E27FC236}">
-              <a16:creationId xmlns:a16="http://schemas.microsoft.com/office/drawing/2014/main" id="{BB3C06AF-9013-9E12-12F3-CF14807C603D}"/>
+              <a16:creationId xmlns:a16="http://schemas.microsoft.com/office/drawing/2014/main" id="{115547D8-6C8E-17C8-D960-275F631E2FDF}"/>
             </a:ext>
           </a:extLst>
         </p:cNvPr>
@@ -7765,7 +8418,7 @@
           <p:cNvPr id="5" name="Picture 2" descr="Trabajar en Bextechnology S.A.S Colombia - Información Laboral Enero 2026">
             <a:extLst>
               <a:ext uri="{FF2B5EF4-FFF2-40B4-BE49-F238E27FC236}">
-                <a16:creationId xmlns:a16="http://schemas.microsoft.com/office/drawing/2014/main" id="{E79D1214-D249-88F4-C9BD-8776CABDB692}"/>
+                <a16:creationId xmlns:a16="http://schemas.microsoft.com/office/drawing/2014/main" id="{7B9ABBD5-0BED-7F59-9475-F2192674E8CA}"/>
               </a:ext>
             </a:extLst>
           </p:cNvPr>
@@ -7789,7 +8442,7 @@
         </p:blipFill>
         <p:spPr bwMode="auto">
           <a:xfrm rot="5400000">
-            <a:off x="5376000" y="-5069996"/>
+            <a:off x="5376000" y="-286980"/>
             <a:ext cx="1440000" cy="12192000"/>
           </a:xfrm>
           <a:prstGeom prst="rect">
@@ -7812,7 +8465,7 @@
           <p:cNvPr id="7" name="Picture 2" descr="Trabajar en Bextechnology S.A.S Colombia - Información Laboral Enero 2026">
             <a:extLst>
               <a:ext uri="{FF2B5EF4-FFF2-40B4-BE49-F238E27FC236}">
-                <a16:creationId xmlns:a16="http://schemas.microsoft.com/office/drawing/2014/main" id="{EA09F6E6-C70A-15BA-AE62-8A1857F9BE82}"/>
+                <a16:creationId xmlns:a16="http://schemas.microsoft.com/office/drawing/2014/main" id="{03EEE605-2912-2792-1828-9BA82811348A}"/>
               </a:ext>
             </a:extLst>
           </p:cNvPr>
@@ -7836,7 +8489,7 @@
         </p:blipFill>
         <p:spPr bwMode="auto">
           <a:xfrm>
-            <a:off x="273381" y="0"/>
+            <a:off x="10460736" y="0"/>
             <a:ext cx="1440000" cy="6904780"/>
           </a:xfrm>
           <a:prstGeom prst="rect">
@@ -7859,7 +8512,7 @@
           <p:cNvPr id="2" name="Title 1">
             <a:extLst>
               <a:ext uri="{FF2B5EF4-FFF2-40B4-BE49-F238E27FC236}">
-                <a16:creationId xmlns:a16="http://schemas.microsoft.com/office/drawing/2014/main" id="{A6F47778-BD5D-AA9F-C410-0DDCCB761B0B}"/>
+                <a16:creationId xmlns:a16="http://schemas.microsoft.com/office/drawing/2014/main" id="{211F5934-B41B-DDA7-C758-AACBB0FB32DB}"/>
               </a:ext>
             </a:extLst>
           </p:cNvPr>
@@ -7872,7 +8525,7 @@
         </p:nvSpPr>
         <p:spPr>
           <a:xfrm>
-            <a:off x="2471693" y="2052008"/>
+            <a:off x="865632" y="246917"/>
             <a:ext cx="8729472" cy="824410"/>
           </a:xfrm>
         </p:spPr>
@@ -7888,7 +8541,7 @@
                   <a:srgbClr val="8A0000"/>
                 </a:solidFill>
               </a:rPr>
-              <a:t>Vamos a verlo</a:t>
+              <a:t>Restos</a:t>
             </a:r>
             <a:endParaRPr lang="es-CO" sz="4800" dirty="0">
               <a:solidFill>
@@ -7903,7 +8556,7 @@
           <p:cNvPr id="1026" name="Picture 2" descr="Trabajar en Bextechnology S.A.S Colombia - Información Laboral Enero 2026">
             <a:extLst>
               <a:ext uri="{FF2B5EF4-FFF2-40B4-BE49-F238E27FC236}">
-                <a16:creationId xmlns:a16="http://schemas.microsoft.com/office/drawing/2014/main" id="{871A5554-38F2-E775-1DD1-D834F87AF224}"/>
+                <a16:creationId xmlns:a16="http://schemas.microsoft.com/office/drawing/2014/main" id="{5331A79B-6CCD-F465-A92C-4D601315E8EE}"/>
               </a:ext>
             </a:extLst>
           </p:cNvPr>
@@ -7927,7 +8580,7 @@
         </p:blipFill>
         <p:spPr bwMode="auto">
           <a:xfrm>
-            <a:off x="463029" y="495652"/>
+            <a:off x="10650384" y="5278668"/>
             <a:ext cx="1060704" cy="1060704"/>
           </a:xfrm>
           <a:prstGeom prst="rect">
@@ -7947,10 +8600,10 @@
       </p:pic>
       <p:pic>
         <p:nvPicPr>
-          <p:cNvPr id="8198" name="Picture 6" descr="Codigo programacion concepto: Más de 90,725 ilustraciones y dibujos de  stock con licencia libres de regalías | Shutterstock">
-            <a:extLst>
-              <a:ext uri="{FF2B5EF4-FFF2-40B4-BE49-F238E27FC236}">
-                <a16:creationId xmlns:a16="http://schemas.microsoft.com/office/drawing/2014/main" id="{808BACF7-959B-876C-D91B-FE8FD5854E19}"/>
+          <p:cNvPr id="3" name="Picture 2">
+            <a:extLst>
+              <a:ext uri="{FF2B5EF4-FFF2-40B4-BE49-F238E27FC236}">
+                <a16:creationId xmlns:a16="http://schemas.microsoft.com/office/drawing/2014/main" id="{3B2D2435-B5B8-C41B-C939-B620C3FDA803}"/>
               </a:ext>
             </a:extLst>
           </p:cNvPr>
@@ -7959,7 +8612,7 @@
           </p:cNvPicPr>
           <p:nvPr/>
         </p:nvPicPr>
-        <p:blipFill>
+        <p:blipFill rotWithShape="1">
           <a:blip r:embed="rId3">
             <a:extLst>
               <a:ext uri="{28A0092B-C50C-407E-A947-70E740481C1C}">
@@ -7967,15 +8620,15 @@
               </a:ext>
             </a:extLst>
           </a:blip>
-          <a:srcRect/>
+          <a:srcRect t="4128"/>
           <a:stretch>
             <a:fillRect/>
           </a:stretch>
         </p:blipFill>
         <p:spPr bwMode="auto">
           <a:xfrm>
-            <a:off x="4474991" y="2876418"/>
-            <a:ext cx="4722876" cy="3542157"/>
+            <a:off x="3065622" y="1405753"/>
+            <a:ext cx="4329493" cy="3348841"/>
           </a:xfrm>
           <a:prstGeom prst="rect">
             <a:avLst/>
@@ -7995,20 +8648,20 @@
     </p:spTree>
     <p:extLst>
       <p:ext uri="{BB962C8B-B14F-4D97-AF65-F5344CB8AC3E}">
-        <p14:creationId xmlns:p14="http://schemas.microsoft.com/office/powerpoint/2010/main" val="2021524294"/>
+        <p14:creationId xmlns:p14="http://schemas.microsoft.com/office/powerpoint/2010/main" val="150633325"/>
       </p:ext>
     </p:extLst>
   </p:cSld>
   <p:clrMapOvr>
     <a:masterClrMapping/>
   </p:clrMapOvr>
-  <mc:AlternateContent xmlns:mc="http://schemas.openxmlformats.org/markup-compatibility/2006">
-    <mc:Choice xmlns:p159="http://schemas.microsoft.com/office/powerpoint/2015/09/main" Requires="p159">
+  <mc:AlternateContent xmlns:mc="http://schemas.openxmlformats.org/markup-compatibility/2006" xmlns:p159="http://schemas.microsoft.com/office/powerpoint/2015/09/main">
+    <mc:Choice Requires="p159">
       <p:transition xmlns:p14="http://schemas.microsoft.com/office/powerpoint/2010/main" spd="slow" p14:dur="2000">
         <p159:morph option="byObject"/>
       </p:transition>
     </mc:Choice>
-    <mc:Fallback>
+    <mc:Fallback xmlns="">
       <p:transition spd="slow">
         <p:fade/>
       </p:transition>
